--- a/presentation/260916_AI활용_업무지침네비게이터_3차 수정.pptx
+++ b/presentation/260916_AI활용_업무지침네비게이터_3차 수정.pptx
@@ -7703,26 +7703,7 @@
               <a:rPr lang="ko-KR" altLang="en-US" sz="1300"/>
               <a:t>개 </a:t>
             </a:r>
-            <a:r>
-              <a:rPr lang="en-US" altLang="ko-KR" sz="1300"/>
-              <a:t>(</a:t>
-            </a:r>
-            <a:r>
-              <a:rPr lang="ko-KR" altLang="en-US" sz="1300"/>
-              <a:t>섹션</a:t>
-            </a:r>
-            <a:r>
-              <a:rPr lang="en-US" altLang="ko-KR" sz="1300"/>
-              <a:t>, </a:t>
-            </a:r>
-            <a:r>
-              <a:rPr lang="ko-KR" altLang="en-US" sz="1300"/>
-              <a:t>팀 제외</a:t>
-            </a:r>
-            <a:r>
-              <a:rPr lang="en-US" altLang="ko-KR" sz="1300"/>
-              <a:t>)</a:t>
-            </a:r>
+            <a:endParaRPr lang="en-US" altLang="ko-KR" sz="1300"/>
           </a:p>
           <a:p>
             <a:pPr marL="90488" indent="-90488">
@@ -7815,7 +7796,7 @@
         <p:spPr>
           <a:xfrm>
             <a:off x="2642487" y="2673600"/>
-            <a:ext cx="2416771" cy="884858"/>
+            <a:ext cx="2416771" cy="620683"/>
           </a:xfrm>
           <a:prstGeom prst="rect">
             <a:avLst/>
@@ -7829,50 +7810,6 @@
           <a:lstStyle/>
           <a:p>
             <a:pPr marL="90488" indent="-90488">
-              <a:spcBef>
-                <a:spcPts val="300"/>
-              </a:spcBef>
-              <a:buClr>
-                <a:schemeClr val="accent1">
-                  <a:lumMod val="60000"/>
-                  <a:lumOff val="40000"/>
-                </a:schemeClr>
-              </a:buClr>
-              <a:buFont typeface="Wingdings" panose="05000000000000000000" pitchFamily="2" charset="2"/>
-              <a:buChar char="§"/>
-            </a:pPr>
-            <a:r>
-              <a:rPr lang="ko-KR" altLang="en-US" sz="1300"/>
-              <a:t> 업무</a:t>
-            </a:r>
-            <a:r>
-              <a:rPr lang="en-US" altLang="ko-KR" sz="1300"/>
-              <a:t> </a:t>
-            </a:r>
-            <a:r>
-              <a:rPr lang="ko-KR" altLang="en-US" sz="1300"/>
-              <a:t>절차</a:t>
-            </a:r>
-            <a:r>
-              <a:rPr lang="en-US" altLang="ko-KR" sz="1300"/>
-              <a:t>, </a:t>
-            </a:r>
-            <a:r>
-              <a:rPr lang="ko-KR" altLang="en-US" sz="1300"/>
-              <a:t>관련 지침</a:t>
-            </a:r>
-            <a:r>
-              <a:rPr lang="en-US" altLang="ko-KR" sz="1300"/>
-              <a:t>, </a:t>
-            </a:r>
-            <a:r>
-              <a:rPr lang="ko-KR" altLang="en-US" sz="1300"/>
-              <a:t>조직</a:t>
-            </a:r>
-            <a:endParaRPr lang="en-US" altLang="ko-KR" sz="1300"/>
-          </a:p>
-          <a:p>
-            <a:pPr>
               <a:spcBef>
                 <a:spcPts val="500"/>
               </a:spcBef>
@@ -7885,14 +7822,36 @@
                   <a:lumOff val="40000"/>
                 </a:schemeClr>
               </a:buClr>
+              <a:buFont typeface="Wingdings" panose="05000000000000000000" pitchFamily="2" charset="2"/>
+              <a:buChar char="§"/>
             </a:pPr>
             <a:r>
+              <a:rPr lang="ko-KR" altLang="en-US" sz="1300"/>
+              <a:t> 업무</a:t>
+            </a:r>
+            <a:r>
               <a:rPr lang="en-US" altLang="ko-KR" sz="1300"/>
-              <a:t>   </a:t>
+              <a:t> </a:t>
             </a:r>
             <a:r>
               <a:rPr lang="ko-KR" altLang="en-US" sz="1300"/>
-              <a:t>정보 수집 </a:t>
+              <a:t>절차</a:t>
+            </a:r>
+            <a:r>
+              <a:rPr lang="en-US" altLang="ko-KR" sz="1300"/>
+              <a:t>, </a:t>
+            </a:r>
+            <a:r>
+              <a:rPr lang="ko-KR" altLang="en-US" sz="1300"/>
+              <a:t>지침</a:t>
+            </a:r>
+            <a:r>
+              <a:rPr lang="en-US" altLang="ko-KR" sz="1300"/>
+              <a:t>, </a:t>
+            </a:r>
+            <a:r>
+              <a:rPr lang="ko-KR" altLang="en-US" sz="1300"/>
+              <a:t>조직 정보 </a:t>
             </a:r>
             <a:endParaRPr lang="en-US" altLang="ko-KR" sz="1300"/>
           </a:p>
@@ -8139,16 +8098,31 @@
               <a:rPr lang="ko-KR" altLang="en-US" sz="1300" spc="-40">
                 <a:latin typeface="+mn-ea"/>
               </a:rPr>
-              <a:t>→ 투자〮회계</a:t>
+              <a:t>→ </a:t>
+            </a:r>
+            <a:r>
+              <a:rPr lang="ko-KR" altLang="en-US" sz="1300" spc="-40">
+                <a:solidFill>
+                  <a:srgbClr val="0000FF"/>
+                </a:solidFill>
+                <a:latin typeface="+mn-ea"/>
+              </a:rPr>
+              <a:t>투자〮회계</a:t>
             </a:r>
             <a:r>
               <a:rPr lang="en-US" altLang="ko-KR" sz="1300" spc="-40">
+                <a:solidFill>
+                  <a:srgbClr val="0000FF"/>
+                </a:solidFill>
                 <a:latin typeface="+mn-ea"/>
               </a:rPr>
               <a:t> 9</a:t>
             </a:r>
             <a:r>
               <a:rPr lang="ko-KR" altLang="en-US" sz="1300" spc="-40">
+                <a:solidFill>
+                  <a:srgbClr val="0000FF"/>
+                </a:solidFill>
                 <a:latin typeface="+mn-ea"/>
               </a:rPr>
               <a:t>개부서로 조정</a:t>
@@ -8216,7 +8190,7 @@
           <p:nvPr>
             <p:extLst>
               <p:ext uri="{D42A27DB-BD31-4B8C-83A1-F6EECF244321}">
-                <p14:modId xmlns:p14="http://schemas.microsoft.com/office/powerpoint/2010/main" val="1274316640"/>
+                <p14:modId xmlns:p14="http://schemas.microsoft.com/office/powerpoint/2010/main" val="3187069975"/>
               </p:ext>
             </p:extLst>
           </p:nvPr>
@@ -8969,7 +8943,7 @@
                           <a:latin typeface="맑은 고딕" panose="020B0503020000020004" pitchFamily="50" charset="-127"/>
                           <a:ea typeface="맑은 고딕" panose="020B0503020000020004" pitchFamily="50" charset="-127"/>
                         </a:rPr>
-                        <a:t>질문의 의미와 유사한 관련 지침 검색</a:t>
+                        <a:t>질문 의미와 유사한 관련 지침 검색</a:t>
                       </a:r>
                     </a:p>
                   </a:txBody>
@@ -13025,8 +12999,8 @@
         </p:nvSpPr>
         <p:spPr>
           <a:xfrm>
-            <a:off x="7470984" y="5975887"/>
-            <a:ext cx="1670730" cy="292388"/>
+            <a:off x="7470983" y="5975887"/>
+            <a:ext cx="2200109" cy="292388"/>
           </a:xfrm>
           <a:prstGeom prst="rect">
             <a:avLst/>
@@ -13041,7 +13015,7 @@
           <a:p>
             <a:r>
               <a:rPr lang="ko-KR" altLang="en-US" sz="1300" spc="-60"/>
-              <a:t>이메일 수신</a:t>
+              <a:t>업무 요청부터 이메일 발송</a:t>
             </a:r>
             <a:endParaRPr lang="ko-KR" altLang="en-US" sz="1300" spc="-60">
               <a:solidFill>
@@ -13531,7 +13505,7 @@
         </p:nvSpPr>
         <p:spPr>
           <a:xfrm>
-            <a:off x="556286" y="3764791"/>
+            <a:off x="556286" y="3731541"/>
             <a:ext cx="9034370" cy="406475"/>
           </a:xfrm>
           <a:prstGeom prst="rect">
@@ -13626,7 +13600,7 @@
         </p:nvGrpSpPr>
         <p:grpSpPr>
           <a:xfrm>
-            <a:off x="310399" y="3874780"/>
+            <a:off x="310399" y="3841530"/>
             <a:ext cx="194324" cy="180020"/>
             <a:chOff x="416496" y="3577457"/>
             <a:chExt cx="194324" cy="180020"/>
@@ -13818,7 +13792,7 @@
         </p:nvSpPr>
         <p:spPr>
           <a:xfrm>
-            <a:off x="380299" y="6132995"/>
+            <a:off x="380299" y="6166245"/>
             <a:ext cx="9289581" cy="505290"/>
           </a:xfrm>
           <a:prstGeom prst="rect">
@@ -13922,7 +13896,7 @@
         </p:nvGrpSpPr>
         <p:grpSpPr>
           <a:xfrm>
-            <a:off x="388532" y="6169914"/>
+            <a:off x="388532" y="6203164"/>
             <a:ext cx="511817" cy="431452"/>
             <a:chOff x="-895525" y="3274733"/>
             <a:chExt cx="619300" cy="474597"/>
@@ -14054,7 +14028,7 @@
         </p:nvCxnSpPr>
         <p:spPr>
           <a:xfrm>
-            <a:off x="352511" y="4561113"/>
+            <a:off x="352511" y="4594363"/>
             <a:ext cx="9299601" cy="0"/>
           </a:xfrm>
           <a:prstGeom prst="line">
@@ -14097,7 +14071,7 @@
         </p:nvGrpSpPr>
         <p:grpSpPr>
           <a:xfrm>
-            <a:off x="362747" y="4206252"/>
+            <a:off x="362747" y="4239502"/>
             <a:ext cx="2783225" cy="307777"/>
             <a:chOff x="536919" y="4223182"/>
             <a:chExt cx="2783225" cy="307777"/>
@@ -14198,7 +14172,7 @@
         </p:nvGrpSpPr>
         <p:grpSpPr>
           <a:xfrm>
-            <a:off x="3312776" y="4206252"/>
+            <a:off x="3312776" y="4239502"/>
             <a:ext cx="2783225" cy="307777"/>
             <a:chOff x="536919" y="4223182"/>
             <a:chExt cx="2783225" cy="307777"/>
@@ -14299,7 +14273,7 @@
         </p:nvGrpSpPr>
         <p:grpSpPr>
           <a:xfrm>
-            <a:off x="6868887" y="4206252"/>
+            <a:off x="6868887" y="4239502"/>
             <a:ext cx="2783225" cy="307777"/>
             <a:chOff x="536919" y="4223182"/>
             <a:chExt cx="2783225" cy="307777"/>
@@ -14400,7 +14374,7 @@
         </p:nvSpPr>
         <p:spPr>
           <a:xfrm>
-            <a:off x="360341" y="4710123"/>
+            <a:off x="360341" y="4743373"/>
             <a:ext cx="2959800" cy="292388"/>
           </a:xfrm>
           <a:prstGeom prst="rect">
@@ -14460,7 +14434,7 @@
         </p:nvSpPr>
         <p:spPr>
           <a:xfrm>
-            <a:off x="360341" y="5142038"/>
+            <a:off x="360341" y="5175288"/>
             <a:ext cx="2959800" cy="292388"/>
           </a:xfrm>
           <a:prstGeom prst="rect">
@@ -14495,7 +14469,7 @@
         </p:nvSpPr>
         <p:spPr>
           <a:xfrm>
-            <a:off x="360340" y="5588351"/>
+            <a:off x="360340" y="5621601"/>
             <a:ext cx="3177515" cy="292388"/>
           </a:xfrm>
           <a:prstGeom prst="rect">
@@ -14530,7 +14504,7 @@
         </p:nvSpPr>
         <p:spPr>
           <a:xfrm>
-            <a:off x="3332140" y="4710123"/>
+            <a:off x="3332140" y="4743373"/>
             <a:ext cx="3631368" cy="292388"/>
           </a:xfrm>
           <a:prstGeom prst="rect">
@@ -14572,7 +14546,7 @@
         </p:nvSpPr>
         <p:spPr>
           <a:xfrm>
-            <a:off x="3332141" y="5142038"/>
+            <a:off x="3332141" y="5175288"/>
             <a:ext cx="3449660" cy="292388"/>
           </a:xfrm>
           <a:prstGeom prst="rect">
@@ -14607,7 +14581,7 @@
         </p:nvSpPr>
         <p:spPr>
           <a:xfrm>
-            <a:off x="3332140" y="5588351"/>
+            <a:off x="3332140" y="5621601"/>
             <a:ext cx="3177515" cy="292388"/>
           </a:xfrm>
           <a:prstGeom prst="rect">
@@ -14642,7 +14616,7 @@
         </p:nvSpPr>
         <p:spPr>
           <a:xfrm>
-            <a:off x="6868887" y="4710123"/>
+            <a:off x="6868887" y="4743373"/>
             <a:ext cx="2670365" cy="292388"/>
           </a:xfrm>
           <a:prstGeom prst="rect">
@@ -14684,7 +14658,7 @@
         </p:nvSpPr>
         <p:spPr>
           <a:xfrm>
-            <a:off x="6868888" y="5142038"/>
+            <a:off x="6868888" y="5175288"/>
             <a:ext cx="2959800" cy="292388"/>
           </a:xfrm>
           <a:prstGeom prst="rect">
@@ -14719,7 +14693,7 @@
         </p:nvSpPr>
         <p:spPr>
           <a:xfrm>
-            <a:off x="6868887" y="5588351"/>
+            <a:off x="6868887" y="5621601"/>
             <a:ext cx="3177515" cy="292388"/>
           </a:xfrm>
           <a:prstGeom prst="rect">
